--- a/exercises/Paper Flow.pptx
+++ b/exercises/Paper Flow.pptx
@@ -8,11 +8,14 @@
     <p:sldId id="256" r:id="rId2"/>
     <p:sldId id="261" r:id="rId3"/>
     <p:sldId id="257" r:id="rId4"/>
+    <p:sldId id="265" r:id="rId16"/>
     <p:sldId id="262" r:id="rId5"/>
+    <p:sldId id="266" r:id="rId17"/>
     <p:sldId id="258" r:id="rId6"/>
     <p:sldId id="259" r:id="rId7"/>
     <p:sldId id="260" r:id="rId8"/>
     <p:sldId id="264" r:id="rId9"/>
+    <p:sldId id="267" r:id="rId18"/>
     <p:sldId id="263" r:id="rId10"/>
   </p:sldIdLst>
   <p:sldSz cx="12192000" cy="6858000"/>
@@ -118,6 +121,916 @@
     </p:ext>
   </p:extLst>
 </p:presentation>
+</file>
+
+<file path=ppt/notesMasters/notesMaster1.xml><?xml version="1.0" encoding="utf-8"?>
+<p:notesMaster xmlns:a="http://schemas.openxmlformats.org/drawingml/2006/main" xmlns:p="http://schemas.openxmlformats.org/presentationml/2006/main" xmlns:r="http://schemas.openxmlformats.org/officeDocument/2006/relationships">
+  <p:cSld>
+    <p:bg>
+      <p:bgRef idx="1001">
+        <a:schemeClr val="bg1"/>
+      </p:bgRef>
+    </p:bg>
+    <p:spTree>
+      <p:nvGrpSpPr>
+        <p:cNvPr id="1" name=""/>
+        <p:cNvGrpSpPr/>
+        <p:nvPr/>
+      </p:nvGrpSpPr>
+      <p:grpSpPr>
+        <a:xfrm>
+          <a:off x="0" y="0"/>
+          <a:ext cx="0" cy="0"/>
+          <a:chOff x="0" y="0"/>
+          <a:chExt cx="0" cy="0"/>
+        </a:xfrm>
+      </p:grpSpPr>
+      <p:sp>
+        <p:nvSpPr>
+          <p:cNvPr id="2" name="Header Placeholder 1"/>
+          <p:cNvSpPr>
+            <a:spLocks noGrp="1"/>
+          </p:cNvSpPr>
+          <p:nvPr>
+            <p:ph type="hdr" sz="quarter"/>
+          </p:nvPr>
+        </p:nvSpPr>
+        <p:spPr>
+          <a:xfrm>
+            <a:off x="0" y="0"/>
+            <a:ext cx="2971800" cy="457200"/>
+          </a:xfrm>
+          <a:prstGeom prst="rect">
+            <a:avLst/>
+          </a:prstGeom>
+        </p:spPr>
+        <p:txBody>
+          <a:bodyPr vert="horz" lIns="91440" tIns="45720" rIns="91440" bIns="45720" rtlCol="0"/>
+          <a:lstStyle>
+            <a:lvl1pPr algn="l">
+              <a:defRPr sz="1200"/>
+            </a:lvl1pPr>
+          </a:lstStyle>
+          <a:p>
+            <a:endParaRPr lang="en-US"/>
+          </a:p>
+        </p:txBody>
+      </p:sp>
+      <p:sp>
+        <p:nvSpPr>
+          <p:cNvPr id="3" name="Date Placeholder 2"/>
+          <p:cNvSpPr>
+            <a:spLocks noGrp="1"/>
+          </p:cNvSpPr>
+          <p:nvPr>
+            <p:ph type="dt" idx="1"/>
+          </p:nvPr>
+        </p:nvSpPr>
+        <p:spPr>
+          <a:xfrm>
+            <a:off x="3884613" y="0"/>
+            <a:ext cx="2971800" cy="457200"/>
+          </a:xfrm>
+          <a:prstGeom prst="rect">
+            <a:avLst/>
+          </a:prstGeom>
+        </p:spPr>
+        <p:txBody>
+          <a:bodyPr vert="horz" lIns="91440" tIns="45720" rIns="91440" bIns="45720" rtlCol="0"/>
+          <a:lstStyle>
+            <a:lvl1pPr algn="r">
+              <a:defRPr sz="1200"/>
+            </a:lvl1pPr>
+          </a:lstStyle>
+          <a:p>
+            <a:fld id="{0F89C1C7-3DCD-1040-A9CF-14679D8B5DDD}" type="datetimeFigureOut">
+              <a:rPr lang="en-US" smtClean="0"/>
+              <a:t>10/17/16</a:t>
+            </a:fld>
+            <a:endParaRPr lang="en-US"/>
+          </a:p>
+        </p:txBody>
+      </p:sp>
+      <p:sp>
+        <p:nvSpPr>
+          <p:cNvPr id="4" name="Slide Image Placeholder 3"/>
+          <p:cNvSpPr>
+            <a:spLocks noGrp="1" noRot="1" noChangeAspect="1"/>
+          </p:cNvSpPr>
+          <p:nvPr>
+            <p:ph type="sldImg" idx="2"/>
+          </p:nvPr>
+        </p:nvSpPr>
+        <p:spPr>
+          <a:xfrm>
+            <a:off x="1143000" y="685800"/>
+            <a:ext cx="4572000" cy="3429000"/>
+          </a:xfrm>
+          <a:prstGeom prst="rect">
+            <a:avLst/>
+          </a:prstGeom>
+          <a:noFill/>
+          <a:ln w="12700">
+            <a:solidFill>
+              <a:prstClr val="black"/>
+            </a:solidFill>
+          </a:ln>
+        </p:spPr>
+        <p:txBody>
+          <a:bodyPr vert="horz" lIns="91440" tIns="45720" rIns="91440" bIns="45720" rtlCol="0" anchor="ctr"/>
+          <a:lstStyle/>
+          <a:p>
+            <a:endParaRPr lang="en-US"/>
+          </a:p>
+        </p:txBody>
+      </p:sp>
+      <p:sp>
+        <p:nvSpPr>
+          <p:cNvPr id="5" name="Notes Placeholder 4"/>
+          <p:cNvSpPr>
+            <a:spLocks noGrp="1"/>
+          </p:cNvSpPr>
+          <p:nvPr>
+            <p:ph type="body" sz="quarter" idx="3"/>
+          </p:nvPr>
+        </p:nvSpPr>
+        <p:spPr>
+          <a:xfrm>
+            <a:off x="685800" y="4343400"/>
+            <a:ext cx="5486400" cy="4114800"/>
+          </a:xfrm>
+          <a:prstGeom prst="rect">
+            <a:avLst/>
+          </a:prstGeom>
+        </p:spPr>
+        <p:txBody>
+          <a:bodyPr vert="horz" lIns="91440" tIns="45720" rIns="91440" bIns="45720" rtlCol="0"/>
+          <a:lstStyle/>
+          <a:p>
+            <a:pPr lvl="0"/>
+            <a:r>
+              <a:rPr lang="en-US" smtClean="0"/>
+              <a:t>Click to edit Master text styles</a:t>
+            </a:r>
+          </a:p>
+          <a:p>
+            <a:pPr lvl="1"/>
+            <a:r>
+              <a:rPr lang="en-US" smtClean="0"/>
+              <a:t>Second level</a:t>
+            </a:r>
+          </a:p>
+          <a:p>
+            <a:pPr lvl="2"/>
+            <a:r>
+              <a:rPr lang="en-US" smtClean="0"/>
+              <a:t>Third level</a:t>
+            </a:r>
+          </a:p>
+          <a:p>
+            <a:pPr lvl="3"/>
+            <a:r>
+              <a:rPr lang="en-US" smtClean="0"/>
+              <a:t>Fourth level</a:t>
+            </a:r>
+          </a:p>
+          <a:p>
+            <a:pPr lvl="4"/>
+            <a:r>
+              <a:rPr lang="en-US" smtClean="0"/>
+              <a:t>Fifth level</a:t>
+            </a:r>
+            <a:endParaRPr lang="en-US"/>
+          </a:p>
+        </p:txBody>
+      </p:sp>
+      <p:sp>
+        <p:nvSpPr>
+          <p:cNvPr id="6" name="Footer Placeholder 5"/>
+          <p:cNvSpPr>
+            <a:spLocks noGrp="1"/>
+          </p:cNvSpPr>
+          <p:nvPr>
+            <p:ph type="ftr" sz="quarter" idx="4"/>
+          </p:nvPr>
+        </p:nvSpPr>
+        <p:spPr>
+          <a:xfrm>
+            <a:off x="0" y="8685213"/>
+            <a:ext cx="2971800" cy="457200"/>
+          </a:xfrm>
+          <a:prstGeom prst="rect">
+            <a:avLst/>
+          </a:prstGeom>
+        </p:spPr>
+        <p:txBody>
+          <a:bodyPr vert="horz" lIns="91440" tIns="45720" rIns="91440" bIns="45720" rtlCol="0" anchor="b"/>
+          <a:lstStyle>
+            <a:lvl1pPr algn="l">
+              <a:defRPr sz="1200"/>
+            </a:lvl1pPr>
+          </a:lstStyle>
+          <a:p>
+            <a:endParaRPr lang="en-US"/>
+          </a:p>
+        </p:txBody>
+      </p:sp>
+      <p:sp>
+        <p:nvSpPr>
+          <p:cNvPr id="7" name="Slide Number Placeholder 6"/>
+          <p:cNvSpPr>
+            <a:spLocks noGrp="1"/>
+          </p:cNvSpPr>
+          <p:nvPr>
+            <p:ph type="sldNum" sz="quarter" idx="5"/>
+          </p:nvPr>
+        </p:nvSpPr>
+        <p:spPr>
+          <a:xfrm>
+            <a:off x="3884613" y="8685213"/>
+            <a:ext cx="2971800" cy="457200"/>
+          </a:xfrm>
+          <a:prstGeom prst="rect">
+            <a:avLst/>
+          </a:prstGeom>
+        </p:spPr>
+        <p:txBody>
+          <a:bodyPr vert="horz" lIns="91440" tIns="45720" rIns="91440" bIns="45720" rtlCol="0" anchor="b"/>
+          <a:lstStyle>
+            <a:lvl1pPr algn="r">
+              <a:defRPr sz="1200"/>
+            </a:lvl1pPr>
+          </a:lstStyle>
+          <a:p>
+            <a:fld id="{BB5E49A5-4136-284D-997B-48E1D791AD67}" type="slidenum">
+              <a:rPr lang="en-US" smtClean="0"/>
+              <a:t>‹#›</a:t>
+            </a:fld>
+            <a:endParaRPr lang="en-US"/>
+          </a:p>
+        </p:txBody>
+      </p:sp>
+    </p:spTree>
+    <p:extLst>
+      <p:ext uri="{BB962C8B-B14F-4D97-AF65-F5344CB8AC3E}">
+        <p14:creationId xmlns:p14="http://schemas.microsoft.com/office/powerpoint/2010/main" val="2623252185"/>
+      </p:ext>
+    </p:extLst>
+  </p:cSld>
+  <p:clrMap bg1="lt1" tx1="dk1" bg2="lt2" tx2="dk2" accent1="accent1" accent2="accent2" accent3="accent3" accent4="accent4" accent5="accent5" accent6="accent6" hlink="hlink" folHlink="folHlink"/>
+  <p:notesStyle>
+    <a:lvl1pPr marL="0" algn="l" defTabSz="457200" rtl="0" eaLnBrk="1" latinLnBrk="0" hangingPunct="1">
+      <a:defRPr sz="1200" kern="1200">
+        <a:solidFill>
+          <a:schemeClr val="tx1"/>
+        </a:solidFill>
+        <a:latin typeface="+mn-lt"/>
+        <a:ea typeface="+mn-ea"/>
+        <a:cs typeface="+mn-cs"/>
+      </a:defRPr>
+    </a:lvl1pPr>
+    <a:lvl2pPr marL="457200" algn="l" defTabSz="457200" rtl="0" eaLnBrk="1" latinLnBrk="0" hangingPunct="1">
+      <a:defRPr sz="1200" kern="1200">
+        <a:solidFill>
+          <a:schemeClr val="tx1"/>
+        </a:solidFill>
+        <a:latin typeface="+mn-lt"/>
+        <a:ea typeface="+mn-ea"/>
+        <a:cs typeface="+mn-cs"/>
+      </a:defRPr>
+    </a:lvl2pPr>
+    <a:lvl3pPr marL="914400" algn="l" defTabSz="457200" rtl="0" eaLnBrk="1" latinLnBrk="0" hangingPunct="1">
+      <a:defRPr sz="1200" kern="1200">
+        <a:solidFill>
+          <a:schemeClr val="tx1"/>
+        </a:solidFill>
+        <a:latin typeface="+mn-lt"/>
+        <a:ea typeface="+mn-ea"/>
+        <a:cs typeface="+mn-cs"/>
+      </a:defRPr>
+    </a:lvl3pPr>
+    <a:lvl4pPr marL="1371600" algn="l" defTabSz="457200" rtl="0" eaLnBrk="1" latinLnBrk="0" hangingPunct="1">
+      <a:defRPr sz="1200" kern="1200">
+        <a:solidFill>
+          <a:schemeClr val="tx1"/>
+        </a:solidFill>
+        <a:latin typeface="+mn-lt"/>
+        <a:ea typeface="+mn-ea"/>
+        <a:cs typeface="+mn-cs"/>
+      </a:defRPr>
+    </a:lvl4pPr>
+    <a:lvl5pPr marL="1828800" algn="l" defTabSz="457200" rtl="0" eaLnBrk="1" latinLnBrk="0" hangingPunct="1">
+      <a:defRPr sz="1200" kern="1200">
+        <a:solidFill>
+          <a:schemeClr val="tx1"/>
+        </a:solidFill>
+        <a:latin typeface="+mn-lt"/>
+        <a:ea typeface="+mn-ea"/>
+        <a:cs typeface="+mn-cs"/>
+      </a:defRPr>
+    </a:lvl5pPr>
+    <a:lvl6pPr marL="2286000" algn="l" defTabSz="457200" rtl="0" eaLnBrk="1" latinLnBrk="0" hangingPunct="1">
+      <a:defRPr sz="1200" kern="1200">
+        <a:solidFill>
+          <a:schemeClr val="tx1"/>
+        </a:solidFill>
+        <a:latin typeface="+mn-lt"/>
+        <a:ea typeface="+mn-ea"/>
+        <a:cs typeface="+mn-cs"/>
+      </a:defRPr>
+    </a:lvl6pPr>
+    <a:lvl7pPr marL="2743200" algn="l" defTabSz="457200" rtl="0" eaLnBrk="1" latinLnBrk="0" hangingPunct="1">
+      <a:defRPr sz="1200" kern="1200">
+        <a:solidFill>
+          <a:schemeClr val="tx1"/>
+        </a:solidFill>
+        <a:latin typeface="+mn-lt"/>
+        <a:ea typeface="+mn-ea"/>
+        <a:cs typeface="+mn-cs"/>
+      </a:defRPr>
+    </a:lvl7pPr>
+    <a:lvl8pPr marL="3200400" algn="l" defTabSz="457200" rtl="0" eaLnBrk="1" latinLnBrk="0" hangingPunct="1">
+      <a:defRPr sz="1200" kern="1200">
+        <a:solidFill>
+          <a:schemeClr val="tx1"/>
+        </a:solidFill>
+        <a:latin typeface="+mn-lt"/>
+        <a:ea typeface="+mn-ea"/>
+        <a:cs typeface="+mn-cs"/>
+      </a:defRPr>
+    </a:lvl8pPr>
+    <a:lvl9pPr marL="3657600" algn="l" defTabSz="457200" rtl="0" eaLnBrk="1" latinLnBrk="0" hangingPunct="1">
+      <a:defRPr sz="1200" kern="1200">
+        <a:solidFill>
+          <a:schemeClr val="tx1"/>
+        </a:solidFill>
+        <a:latin typeface="+mn-lt"/>
+        <a:ea typeface="+mn-ea"/>
+        <a:cs typeface="+mn-cs"/>
+      </a:defRPr>
+    </a:lvl9pPr>
+  </p:notesStyle>
+</p:notesMaster>
+</file>
+
+<file path=ppt/notesSlides/notesSlide1.xml><?xml version="1.0" encoding="utf-8"?>
+<p:notes xmlns:a="http://schemas.openxmlformats.org/drawingml/2006/main" xmlns:p="http://schemas.openxmlformats.org/presentationml/2006/main" xmlns:r="http://schemas.openxmlformats.org/officeDocument/2006/relationships">
+  <p:cSld>
+    <p:spTree>
+      <p:nvGrpSpPr>
+        <p:cNvPr id="1" name=""/>
+        <p:cNvGrpSpPr/>
+        <p:nvPr/>
+      </p:nvGrpSpPr>
+      <p:grpSpPr>
+        <a:xfrm>
+          <a:off x="0" y="0"/>
+          <a:ext cx="0" cy="0"/>
+          <a:chOff x="0" y="0"/>
+          <a:chExt cx="0" cy="0"/>
+        </a:xfrm>
+      </p:grpSpPr>
+      <p:sp>
+        <p:nvSpPr>
+          <p:cNvPr id="2" name="Slide Image Placeholder 1"/>
+          <p:cNvSpPr>
+            <a:spLocks noGrp="1"/>
+          </p:cNvSpPr>
+          <p:nvPr>
+            <p:ph type="sldImg" idx="2"/>
+          </p:nvPr>
+        </p:nvSpPr>
+        <p:spPr/>
+      </p:sp>
+      <p:sp>
+        <p:nvSpPr>
+          <p:cNvPr id="3" name="Notes Placeholder 2"/>
+          <p:cNvSpPr>
+            <a:spLocks noGrp="1"/>
+          </p:cNvSpPr>
+          <p:nvPr>
+            <p:ph type="body" idx="3" sz="quarter"/>
+          </p:nvPr>
+        </p:nvSpPr>
+        <p:spPr/>
+        <p:txBody>
+          <a:bodyPr/>
+          <a:lstStyle/>
+          <a:p>
+            <a:r>
+              <a:t>The map of the domain, and the table allocation. Two things to say and then move on. Onboarding sits outside the loop because the guest is not there for it -- that matters, because five tables are about to take five stages and only four of them are guest-cycle stages. And every stage hands the next one a piece of paper: catalogue, booking, key, invoices. The cycle is a chain of hand-offs before anyone has drawn a desk.</a:t>
+            </a:r>
+          </a:p>
+        </p:txBody>
+      </p:sp>
+      <p:sp>
+        <p:nvSpPr>
+          <p:cNvPr id="4" name="Slide Number Placeholder 3"/>
+          <p:cNvSpPr>
+            <a:spLocks noGrp="1"/>
+          </p:cNvSpPr>
+          <p:nvPr>
+            <p:ph type="sldNum" idx="5" sz="quarter"/>
+          </p:nvPr>
+        </p:nvSpPr>
+        <p:spPr/>
+      </p:sp>
+    </p:spTree>
+  </p:cSld>
+  <p:clrMapOvr>
+    <a:masterClrMapping/>
+  </p:clrMapOvr>
+</p:notes>
+</file>
+
+<file path=ppt/notesSlides/notesSlide2.xml><?xml version="1.0" encoding="utf-8"?>
+<p:notes xmlns:a="http://schemas.openxmlformats.org/drawingml/2006/main" xmlns:p="http://schemas.openxmlformats.org/presentationml/2006/main" xmlns:r="http://schemas.openxmlformats.org/officeDocument/2006/relationships">
+  <p:cSld>
+    <p:spTree>
+      <p:nvGrpSpPr>
+        <p:cNvPr id="1" name=""/>
+        <p:cNvGrpSpPr/>
+        <p:nvPr/>
+      </p:nvGrpSpPr>
+      <p:grpSpPr>
+        <a:xfrm>
+          <a:off x="0" y="0"/>
+          <a:ext cx="0" cy="0"/>
+          <a:chOff x="0" y="0"/>
+          <a:chExt cx="0" cy="0"/>
+        </a:xfrm>
+      </p:grpSpPr>
+      <p:sp>
+        <p:nvSpPr>
+          <p:cNvPr id="2" name="Slide Image Placeholder 1"/>
+          <p:cNvSpPr>
+            <a:spLocks noGrp="1"/>
+          </p:cNvSpPr>
+          <p:nvPr>
+            <p:ph type="sldImg" idx="2"/>
+          </p:nvPr>
+        </p:nvSpPr>
+        <p:spPr/>
+      </p:sp>
+      <p:sp>
+        <p:nvSpPr>
+          <p:cNvPr id="3" name="Notes Placeholder 2"/>
+          <p:cNvSpPr>
+            <a:spLocks noGrp="1"/>
+          </p:cNvSpPr>
+          <p:nvPr>
+            <p:ph type="body" idx="3" sz="quarter"/>
+          </p:nvPr>
+        </p:nvSpPr>
+        <p:spPr/>
+        <p:txBody>
+          <a:bodyPr/>
+          <a:lstStyle/>
+          <a:p>
+            <a:r>
+              <a:t>Leave this up for the whole of round 1. It is the only thing the tables need on screen while they draw, and every table has it on paper as well. Walk the six glyphs once, then stop -- the rule at the top is the only part worth labouring: every hand-off goes out-tray to in-tray, nobody shouts across the office. Enforce it from the first minute.</a:t>
+            </a:r>
+          </a:p>
+        </p:txBody>
+      </p:sp>
+      <p:sp>
+        <p:nvSpPr>
+          <p:cNvPr id="4" name="Slide Number Placeholder 3"/>
+          <p:cNvSpPr>
+            <a:spLocks noGrp="1"/>
+          </p:cNvSpPr>
+          <p:nvPr>
+            <p:ph type="sldNum" idx="5" sz="quarter"/>
+          </p:nvPr>
+        </p:nvSpPr>
+        <p:spPr/>
+      </p:sp>
+    </p:spTree>
+  </p:cSld>
+  <p:clrMapOvr>
+    <a:masterClrMapping/>
+  </p:clrMapOvr>
+</p:notes>
+</file>
+
+<file path=ppt/notesSlides/notesSlide3.xml><?xml version="1.0" encoding="utf-8"?>
+<p:notes xmlns:a="http://schemas.openxmlformats.org/drawingml/2006/main" xmlns:p="http://schemas.openxmlformats.org/presentationml/2006/main" xmlns:r="http://schemas.openxmlformats.org/officeDocument/2006/relationships">
+  <p:cSld>
+    <p:spTree>
+      <p:nvGrpSpPr>
+        <p:cNvPr id="1" name=""/>
+        <p:cNvGrpSpPr/>
+        <p:nvPr/>
+      </p:nvGrpSpPr>
+      <p:grpSpPr>
+        <a:xfrm>
+          <a:off x="0" y="0"/>
+          <a:ext cx="0" cy="0"/>
+          <a:chOff x="0" y="0"/>
+          <a:chExt cx="0" cy="0"/>
+        </a:xfrm>
+      </p:grpSpPr>
+      <p:sp>
+        <p:nvSpPr>
+          <p:cNvPr id="2" name="Slide Image Placeholder 1"/>
+          <p:cNvSpPr>
+            <a:spLocks noGrp="1"/>
+          </p:cNvSpPr>
+          <p:nvPr>
+            <p:ph type="sldImg" idx="2"/>
+          </p:nvPr>
+        </p:nvSpPr>
+        <p:spPr/>
+      </p:sp>
+      <p:sp>
+        <p:nvSpPr>
+          <p:cNvPr id="3" name="Notes Placeholder 2"/>
+          <p:cNvSpPr>
+            <a:spLocks noGrp="1"/>
+          </p:cNvSpPr>
+          <p:nvPr>
+            <p:ph type="body" idx="3" sz="quarter"/>
+          </p:nvPr>
+        </p:nvSpPr>
+        <p:spPr/>
+        <p:txBody>
+          <a:bodyPr/>
+          <a:lstStyle/>
+          <a:p>
+            <a:r>
+              <a:t>STOP. Everything after this slide is an answer. The four hotel flows used to sit immediately after the task slide, which put the answers in front of the room before the work -- see-one/do-one makes that wrong, and the see-one is the takeaway, not the hotel. Reveal them one per table, in cycle order, and reveal Departure LAST: no worked flow for it exists in the delegates' world, so it is the collective piece. Ask the Departure table to walk theirs before you show ours, and if theirs is better, say so. Land the line here -- ACID transactions take place at a desk; BASE takes place across desks. It works at this moment and nowhere else, because the out-tray rule has just been enforced for forty minutes.</a:t>
+            </a:r>
+          </a:p>
+        </p:txBody>
+      </p:sp>
+      <p:sp>
+        <p:nvSpPr>
+          <p:cNvPr id="4" name="Slide Number Placeholder 3"/>
+          <p:cNvSpPr>
+            <a:spLocks noGrp="1"/>
+          </p:cNvSpPr>
+          <p:nvPr>
+            <p:ph type="sldNum" idx="5" sz="quarter"/>
+          </p:nvPr>
+        </p:nvSpPr>
+        <p:spPr/>
+      </p:sp>
+    </p:spTree>
+  </p:cSld>
+  <p:clrMapOvr>
+    <a:masterClrMapping/>
+  </p:clrMapOvr>
+</p:notes>
+</file>
+
+<file path=ppt/notesSlides/notesSlide4.xml><?xml version="1.0" encoding="utf-8"?>
+<p:notes xmlns:a="http://schemas.openxmlformats.org/drawingml/2006/main" xmlns:p="http://schemas.openxmlformats.org/presentationml/2006/main" xmlns:r="http://schemas.openxmlformats.org/officeDocument/2006/relationships">
+  <p:cSld>
+    <p:spTree>
+      <p:nvGrpSpPr>
+        <p:cNvPr id="1" name=""/>
+        <p:cNvGrpSpPr/>
+        <p:nvPr/>
+      </p:nvGrpSpPr>
+      <p:grpSpPr>
+        <a:xfrm>
+          <a:off x="0" y="0"/>
+          <a:ext cx="0" cy="0"/>
+          <a:chOff x="0" y="0"/>
+          <a:chExt cx="0" cy="0"/>
+        </a:xfrm>
+      </p:grpSpPr>
+      <p:sp>
+        <p:nvSpPr>
+          <p:cNvPr id="2" name="Slide Image Placeholder 1"/>
+          <p:cNvSpPr>
+            <a:spLocks noGrp="1"/>
+          </p:cNvSpPr>
+          <p:nvPr>
+            <p:ph type="sldImg" idx="2"/>
+          </p:nvPr>
+        </p:nvSpPr>
+        <p:spPr/>
+      </p:sp>
+      <p:sp>
+        <p:nvSpPr>
+          <p:cNvPr id="3" name="Notes Placeholder 2"/>
+          <p:cNvSpPr>
+            <a:spLocks noGrp="1"/>
+          </p:cNvSpPr>
+          <p:nvPr>
+            <p:ph type="body" idx="3" sz="quarter"/>
+          </p:nvPr>
+        </p:nvSpPr>
+        <p:spPr/>
+        <p:txBody>
+          <a:bodyPr/>
+          <a:lstStyle/>
+          <a:p>
+            <a:r>
+              <a:t>Reveal this one last, and only after the Departure table has walked their own. Five desk-turns. Step 3 is the one to point at: the guest settles the bill and hands the key back in the same turn, so it is one number branching to two arrows -- that is how you show two things happening at once without reusing a number. The muted stub above the Guest Stay File is the answer to the question the task actually asked: the invoices have been landing in that file all week. The bill is not written at check-out; it is totalled from paper that was already there.</a:t>
+            </a:r>
+          </a:p>
+        </p:txBody>
+      </p:sp>
+      <p:sp>
+        <p:nvSpPr>
+          <p:cNvPr id="4" name="Slide Number Placeholder 3"/>
+          <p:cNvSpPr>
+            <a:spLocks noGrp="1"/>
+          </p:cNvSpPr>
+          <p:nvPr>
+            <p:ph type="sldNum" idx="5" sz="quarter"/>
+          </p:nvPr>
+        </p:nvSpPr>
+        <p:spPr/>
+      </p:sp>
+    </p:spTree>
+  </p:cSld>
+  <p:clrMapOvr>
+    <a:masterClrMapping/>
+  </p:clrMapOvr>
+</p:notes>
+</file>
+
+<file path=ppt/notesSlides/notesSlide5.xml><?xml version="1.0" encoding="utf-8"?>
+<p:notes xmlns:a="http://schemas.openxmlformats.org/drawingml/2006/main" xmlns:p="http://schemas.openxmlformats.org/presentationml/2006/main" xmlns:r="http://schemas.openxmlformats.org/officeDocument/2006/relationships">
+  <p:cSld>
+    <p:spTree>
+      <p:nvGrpSpPr>
+        <p:cNvPr id="1" name=""/>
+        <p:cNvGrpSpPr/>
+        <p:nvPr/>
+      </p:nvGrpSpPr>
+      <p:grpSpPr>
+        <a:xfrm>
+          <a:off x="0" y="0"/>
+          <a:ext cx="0" cy="0"/>
+          <a:chOff x="0" y="0"/>
+          <a:chExt cx="0" cy="0"/>
+        </a:xfrm>
+      </p:grpSpPr>
+      <p:sp>
+        <p:nvSpPr>
+          <p:cNvPr id="2" name="Slide Image Placeholder 1"/>
+          <p:cNvSpPr>
+            <a:spLocks noGrp="1"/>
+          </p:cNvSpPr>
+          <p:nvPr>
+            <p:ph type="sldImg" idx="2"/>
+          </p:nvPr>
+        </p:nvSpPr>
+        <p:spPr/>
+      </p:sp>
+      <p:sp>
+        <p:nvSpPr>
+          <p:cNvPr id="3" name="Notes Placeholder 2"/>
+          <p:cNvSpPr>
+            <a:spLocks noGrp="1"/>
+          </p:cNvSpPr>
+          <p:nvPr>
+            <p:ph type="body" idx="3" sz="quarter"/>
+          </p:nvPr>
+        </p:nvSpPr>
+        <p:spPr/>
+        <p:txBody>
+          <a:bodyPr/>
+          <a:lstStyle/>
+          <a:p>
+            <a:r>
+              <a:t>Hotel Onboarding. Five desks and two organisations, so it has the most boundary crossings of the five -- point at the heavy bar. The Catalogue Maker is the only desk that owns the catalogue, and every later stage depends on it; that is the whole argument for why Onboarding is not a guest-cycle stage.</a:t>
+            </a:r>
+          </a:p>
+        </p:txBody>
+      </p:sp>
+      <p:sp>
+        <p:nvSpPr>
+          <p:cNvPr id="4" name="Slide Number Placeholder 3"/>
+          <p:cNvSpPr>
+            <a:spLocks noGrp="1"/>
+          </p:cNvSpPr>
+          <p:nvPr>
+            <p:ph type="sldNum" idx="5" sz="quarter"/>
+          </p:nvPr>
+        </p:nvSpPr>
+        <p:spPr/>
+      </p:sp>
+    </p:spTree>
+  </p:cSld>
+  <p:clrMapOvr>
+    <a:masterClrMapping/>
+  </p:clrMapOvr>
+</p:notes>
+</file>
+
+<file path=ppt/notesSlides/notesSlide6.xml><?xml version="1.0" encoding="utf-8"?>
+<p:notes xmlns:a="http://schemas.openxmlformats.org/drawingml/2006/main" xmlns:p="http://schemas.openxmlformats.org/presentationml/2006/main" xmlns:r="http://schemas.openxmlformats.org/officeDocument/2006/relationships">
+  <p:cSld>
+    <p:spTree>
+      <p:nvGrpSpPr>
+        <p:cNvPr id="1" name=""/>
+        <p:cNvGrpSpPr/>
+        <p:nvPr/>
+      </p:nvGrpSpPr>
+      <p:grpSpPr>
+        <a:xfrm>
+          <a:off x="0" y="0"/>
+          <a:ext cx="0" cy="0"/>
+          <a:chOff x="0" y="0"/>
+          <a:chExt cx="0" cy="0"/>
+        </a:xfrm>
+      </p:grpSpPr>
+      <p:sp>
+        <p:nvSpPr>
+          <p:cNvPr id="2" name="Slide Image Placeholder 1"/>
+          <p:cNvSpPr>
+            <a:spLocks noGrp="1"/>
+          </p:cNvSpPr>
+          <p:nvPr>
+            <p:ph type="sldImg" idx="2"/>
+          </p:nvPr>
+        </p:nvSpPr>
+        <p:spPr/>
+      </p:sp>
+      <p:sp>
+        <p:nvSpPr>
+          <p:cNvPr id="3" name="Notes Placeholder 2"/>
+          <p:cNvSpPr>
+            <a:spLocks noGrp="1"/>
+          </p:cNvSpPr>
+          <p:nvPr>
+            <p:ph type="body" idx="3" sz="quarter"/>
+          </p:nvPr>
+        </p:nvSpPr>
+        <p:spPr/>
+        <p:txBody>
+          <a:bodyPr/>
+          <a:lstStyle/>
+          <a:p>
+            <a:r>
+              <a:t>Pre-Arrival. The one the room will recognise in Process Automation later, because its three participants become the three BPMN pools. Point at the fax operator: a desk whose entire job is moving a message between two organisations is a channel, and nobody has said that word yet.</a:t>
+            </a:r>
+          </a:p>
+        </p:txBody>
+      </p:sp>
+      <p:sp>
+        <p:nvSpPr>
+          <p:cNvPr id="4" name="Slide Number Placeholder 3"/>
+          <p:cNvSpPr>
+            <a:spLocks noGrp="1"/>
+          </p:cNvSpPr>
+          <p:nvPr>
+            <p:ph type="sldNum" idx="5" sz="quarter"/>
+          </p:nvPr>
+        </p:nvSpPr>
+        <p:spPr/>
+      </p:sp>
+    </p:spTree>
+  </p:cSld>
+  <p:clrMapOvr>
+    <a:masterClrMapping/>
+  </p:clrMapOvr>
+</p:notes>
+</file>
+
+<file path=ppt/notesSlides/notesSlide7.xml><?xml version="1.0" encoding="utf-8"?>
+<p:notes xmlns:a="http://schemas.openxmlformats.org/drawingml/2006/main" xmlns:p="http://schemas.openxmlformats.org/presentationml/2006/main" xmlns:r="http://schemas.openxmlformats.org/officeDocument/2006/relationships">
+  <p:cSld>
+    <p:spTree>
+      <p:nvGrpSpPr>
+        <p:cNvPr id="1" name=""/>
+        <p:cNvGrpSpPr/>
+        <p:nvPr/>
+      </p:nvGrpSpPr>
+      <p:grpSpPr>
+        <a:xfrm>
+          <a:off x="0" y="0"/>
+          <a:ext cx="0" cy="0"/>
+          <a:chOff x="0" y="0"/>
+          <a:chExt cx="0" cy="0"/>
+        </a:xfrm>
+      </p:grpSpPr>
+      <p:sp>
+        <p:nvSpPr>
+          <p:cNvPr id="2" name="Slide Image Placeholder 1"/>
+          <p:cNvSpPr>
+            <a:spLocks noGrp="1"/>
+          </p:cNvSpPr>
+          <p:nvPr>
+            <p:ph type="sldImg" idx="2"/>
+          </p:nvPr>
+        </p:nvSpPr>
+        <p:spPr/>
+      </p:sp>
+      <p:sp>
+        <p:nvSpPr>
+          <p:cNvPr id="3" name="Notes Placeholder 2"/>
+          <p:cNvSpPr>
+            <a:spLocks noGrp="1"/>
+          </p:cNvSpPr>
+          <p:nvPr>
+            <p:ph type="body" idx="3" sz="quarter"/>
+          </p:nvPr>
+        </p:nvSpPr>
+        <p:spPr/>
+        <p:txBody>
+          <a:bodyPr/>
+          <a:lstStyle/>
+          <a:p>
+            <a:r>
+              <a:t>Arrival. The shortest of the five, and the one where the file does the work -- the Front Desk files the booking confirmation, then looks it up again to issue the key. Same desk, two turns, and it cannot remember anything between them without the file.</a:t>
+            </a:r>
+          </a:p>
+        </p:txBody>
+      </p:sp>
+      <p:sp>
+        <p:nvSpPr>
+          <p:cNvPr id="4" name="Slide Number Placeholder 3"/>
+          <p:cNvSpPr>
+            <a:spLocks noGrp="1"/>
+          </p:cNvSpPr>
+          <p:nvPr>
+            <p:ph type="sldNum" idx="5" sz="quarter"/>
+          </p:nvPr>
+        </p:nvSpPr>
+        <p:spPr/>
+      </p:sp>
+    </p:spTree>
+  </p:cSld>
+  <p:clrMapOvr>
+    <a:masterClrMapping/>
+  </p:clrMapOvr>
+</p:notes>
+</file>
+
+<file path=ppt/notesSlides/notesSlide8.xml><?xml version="1.0" encoding="utf-8"?>
+<p:notes xmlns:a="http://schemas.openxmlformats.org/drawingml/2006/main" xmlns:p="http://schemas.openxmlformats.org/presentationml/2006/main" xmlns:r="http://schemas.openxmlformats.org/officeDocument/2006/relationships">
+  <p:cSld>
+    <p:spTree>
+      <p:nvGrpSpPr>
+        <p:cNvPr id="1" name=""/>
+        <p:cNvGrpSpPr/>
+        <p:nvPr/>
+      </p:nvGrpSpPr>
+      <p:grpSpPr>
+        <a:xfrm>
+          <a:off x="0" y="0"/>
+          <a:ext cx="0" cy="0"/>
+          <a:chOff x="0" y="0"/>
+          <a:chExt cx="0" cy="0"/>
+        </a:xfrm>
+      </p:grpSpPr>
+      <p:sp>
+        <p:nvSpPr>
+          <p:cNvPr id="2" name="Slide Image Placeholder 1"/>
+          <p:cNvSpPr>
+            <a:spLocks noGrp="1"/>
+          </p:cNvSpPr>
+          <p:nvPr>
+            <p:ph type="sldImg" idx="2"/>
+          </p:nvPr>
+        </p:nvSpPr>
+        <p:spPr/>
+      </p:sp>
+      <p:sp>
+        <p:nvSpPr>
+          <p:cNvPr id="3" name="Notes Placeholder 2"/>
+          <p:cNvSpPr>
+            <a:spLocks noGrp="1"/>
+          </p:cNvSpPr>
+          <p:nvPr>
+            <p:ph type="body" idx="3" sz="quarter"/>
+          </p:nvPr>
+        </p:nvSpPr>
+        <p:spPr/>
+        <p:txBody>
+          <a:bodyPr/>
+          <a:lstStyle/>
+          <a:p>
+            <a:r>
+              <a:t>Occupancy. Ends by filing the room-service invoice in the Guest Stay File, which is exactly where Departure picks up. Show this immediately before Departure so the room sees the join.</a:t>
+            </a:r>
+          </a:p>
+        </p:txBody>
+      </p:sp>
+      <p:sp>
+        <p:nvSpPr>
+          <p:cNvPr id="4" name="Slide Number Placeholder 3"/>
+          <p:cNvSpPr>
+            <a:spLocks noGrp="1"/>
+          </p:cNvSpPr>
+          <p:nvPr>
+            <p:ph type="sldNum" idx="5" sz="quarter"/>
+          </p:nvPr>
+        </p:nvSpPr>
+        <p:spPr/>
+      </p:sp>
+    </p:spTree>
+  </p:cSld>
+  <p:clrMapOvr>
+    <a:masterClrMapping/>
+  </p:clrMapOvr>
+</p:notes>
 </file>
 
 <file path=ppt/slideLayouts/slideLayout1.xml><?xml version="1.0" encoding="utf-8"?>
@@ -3403,6 +4316,244 @@
 </p:sld>
 </file>
 
+<file path=ppt/slides/slide10.xml><?xml version="1.0" encoding="utf-8"?>
+<p:sld xmlns:a="http://schemas.openxmlformats.org/drawingml/2006/main" xmlns:r="http://schemas.openxmlformats.org/officeDocument/2006/relationships" xmlns:p="http://schemas.openxmlformats.org/presentationml/2006/main">
+  <p:cSld>
+    <p:spTree>
+      <p:nvGrpSpPr>
+        <p:cNvPr id="1" name=""/>
+        <p:cNvGrpSpPr/>
+        <p:nvPr/>
+      </p:nvGrpSpPr>
+      <p:grpSpPr>
+        <a:xfrm>
+          <a:off x="0" y="0"/>
+          <a:ext cx="0" cy="0"/>
+          <a:chOff x="0" y="0"/>
+          <a:chExt cx="0" cy="0"/>
+        </a:xfrm>
+      </p:grpSpPr>
+      <p:pic>
+        <p:nvPicPr>
+          <p:cNvPr id="5" name="Picture 4" descr="A diagram of a service&#10;&#10;Description automatically generated">
+            <a:extLst>
+              <a:ext uri="{FF2B5EF4-FFF2-40B4-BE49-F238E27FC236}">
+                <a16:creationId xmlns:a16="http://schemas.microsoft.com/office/drawing/2014/main" id="{6A5EF504-89C5-07FD-0B0C-16BCD1A79D96}"/>
+              </a:ext>
+            </a:extLst>
+          </p:cNvPr>
+          <p:cNvPicPr>
+            <a:picLocks noChangeAspect="1"/>
+          </p:cNvPicPr>
+          <p:nvPr/>
+        </p:nvPicPr>
+        <p:blipFill>
+          <a:blip r:embed="rId2"/>
+          <a:stretch>
+            <a:fillRect/>
+          </a:stretch>
+        </p:blipFill>
+        <p:spPr>
+          <a:xfrm>
+            <a:off x="2698750" y="1035050"/>
+            <a:ext cx="6794500" cy="4787900"/>
+          </a:xfrm>
+          <a:prstGeom prst="rect">
+            <a:avLst/>
+          </a:prstGeom>
+        </p:spPr>
+      </p:pic>
+    </p:spTree>
+    <p:extLst>
+      <p:ext uri="{BB962C8B-B14F-4D97-AF65-F5344CB8AC3E}">
+        <p14:creationId xmlns:p14="http://schemas.microsoft.com/office/powerpoint/2010/main" val="2233859570"/>
+      </p:ext>
+    </p:extLst>
+  </p:cSld>
+  <p:clrMapOvr>
+    <a:masterClrMapping/>
+  </p:clrMapOvr>
+</p:sld>
+</file>
+
+<file path=ppt/slides/slide11.xml><?xml version="1.0" encoding="utf-8"?>
+<p:sld xmlns:a="http://schemas.openxmlformats.org/drawingml/2006/main" xmlns:p="http://schemas.openxmlformats.org/presentationml/2006/main" xmlns:r="http://schemas.openxmlformats.org/officeDocument/2006/relationships">
+  <p:cSld>
+    <p:spTree>
+      <p:nvGrpSpPr>
+        <p:cNvPr id="1" name=""/>
+        <p:cNvGrpSpPr/>
+        <p:nvPr/>
+      </p:nvGrpSpPr>
+      <p:grpSpPr/>
+      <p:pic>
+        <p:nvPicPr>
+          <p:cNvPr id="2" name="Picture 1" descr="Departure.png"/>
+          <p:cNvPicPr>
+            <a:picLocks noChangeAspect="1"/>
+          </p:cNvPicPr>
+          <p:nvPr/>
+        </p:nvPicPr>
+        <p:blipFill>
+          <a:blip r:embed="rId2"/>
+          <a:stretch>
+            <a:fillRect/>
+          </a:stretch>
+        </p:blipFill>
+        <p:spPr>
+          <a:xfrm>
+            <a:off x="1705840" y="457200"/>
+            <a:ext cx="8780318" cy="5943599"/>
+          </a:xfrm>
+          <a:prstGeom prst="rect">
+            <a:avLst/>
+          </a:prstGeom>
+        </p:spPr>
+      </p:pic>
+    </p:spTree>
+  </p:cSld>
+  <p:clrMapOvr>
+    <a:masterClrMapping/>
+  </p:clrMapOvr>
+</p:sld>
+</file>
+
+<file path=ppt/slides/slide12.xml><?xml version="1.0" encoding="utf-8"?>
+<p:sld xmlns:a="http://schemas.openxmlformats.org/drawingml/2006/main" xmlns:r="http://schemas.openxmlformats.org/officeDocument/2006/relationships" xmlns:p="http://schemas.openxmlformats.org/presentationml/2006/main">
+  <p:cSld>
+    <p:spTree>
+      <p:nvGrpSpPr>
+        <p:cNvPr id="1" name=""/>
+        <p:cNvGrpSpPr/>
+        <p:nvPr/>
+      </p:nvGrpSpPr>
+      <p:grpSpPr>
+        <a:xfrm>
+          <a:off x="0" y="0"/>
+          <a:ext cx="0" cy="0"/>
+          <a:chOff x="0" y="0"/>
+          <a:chExt cx="0" cy="0"/>
+        </a:xfrm>
+      </p:grpSpPr>
+      <p:sp>
+        <p:nvSpPr>
+          <p:cNvPr id="2" name="Title 1">
+            <a:extLst>
+              <a:ext uri="{FF2B5EF4-FFF2-40B4-BE49-F238E27FC236}">
+                <a16:creationId xmlns:a16="http://schemas.microsoft.com/office/drawing/2014/main" id="{FF65E1A8-624A-201C-7B77-2ACA62051C83}"/>
+              </a:ext>
+            </a:extLst>
+          </p:cNvPr>
+          <p:cNvSpPr>
+            <a:spLocks noGrp="1"/>
+          </p:cNvSpPr>
+          <p:nvPr>
+            <p:ph type="title"/>
+          </p:nvPr>
+        </p:nvSpPr>
+        <p:spPr/>
+        <p:txBody>
+          <a:bodyPr/>
+          <a:lstStyle/>
+          <a:p>
+            <a:r>
+              <a:rPr lang="en-GB" dirty="0"/>
+              <a:t>What Would This Look Like?</a:t>
+            </a:r>
+          </a:p>
+        </p:txBody>
+      </p:sp>
+      <p:sp>
+        <p:nvSpPr>
+          <p:cNvPr id="3" name="Content Placeholder 2">
+            <a:extLst>
+              <a:ext uri="{FF2B5EF4-FFF2-40B4-BE49-F238E27FC236}">
+                <a16:creationId xmlns:a16="http://schemas.microsoft.com/office/drawing/2014/main" id="{E7652786-E9AE-56EB-AE90-95A87636056F}"/>
+              </a:ext>
+            </a:extLst>
+          </p:cNvPr>
+          <p:cNvSpPr>
+            <a:spLocks noGrp="1"/>
+          </p:cNvSpPr>
+          <p:nvPr>
+            <p:ph idx="1"/>
+          </p:nvPr>
+        </p:nvSpPr>
+        <p:spPr/>
+        <p:txBody>
+          <a:bodyPr>
+            <a:normAutofit/>
+          </a:bodyPr>
+          <a:lstStyle/>
+          <a:p>
+            <a:r>
+              <a:rPr lang="en-GB"/>
+              <a:t>Take any </a:t>
+            </a:r>
+            <a:r>
+              <a:rPr lang="en-GB" dirty="0"/>
+              <a:t>Step from the Paper Model and think of it in FBP</a:t>
+            </a:r>
+          </a:p>
+          <a:p>
+            <a:pPr lvl="1"/>
+            <a:r>
+              <a:rPr lang="en-GB" dirty="0"/>
+              <a:t>What are the Information Packets, Nodes and Ports</a:t>
+            </a:r>
+          </a:p>
+          <a:p>
+            <a:pPr lvl="1"/>
+            <a:r>
+              <a:rPr lang="en-GB" dirty="0"/>
+              <a:t>Where do we have lookups?</a:t>
+            </a:r>
+          </a:p>
+          <a:p>
+            <a:pPr lvl="1"/>
+            <a:r>
+              <a:rPr lang="en-GB" dirty="0"/>
+              <a:t>Where do we need to store state?</a:t>
+            </a:r>
+          </a:p>
+          <a:p>
+            <a:r>
+              <a:rPr lang="en-GB" dirty="0"/>
+              <a:t>Think about what patterns of messaging we might have?</a:t>
+            </a:r>
+          </a:p>
+          <a:p>
+            <a:pPr lvl="1"/>
+            <a:r>
+              <a:rPr lang="en-GB" dirty="0"/>
+              <a:t>In-Out?</a:t>
+            </a:r>
+          </a:p>
+          <a:p>
+            <a:pPr lvl="1"/>
+            <a:r>
+              <a:rPr lang="en-GB" dirty="0"/>
+              <a:t>Out-Only?</a:t>
+            </a:r>
+          </a:p>
+          <a:p>
+            <a:endParaRPr lang="en-GB" dirty="0"/>
+          </a:p>
+        </p:txBody>
+      </p:sp>
+    </p:spTree>
+    <p:extLst>
+      <p:ext uri="{BB962C8B-B14F-4D97-AF65-F5344CB8AC3E}">
+        <p14:creationId xmlns:p14="http://schemas.microsoft.com/office/powerpoint/2010/main" val="39058674"/>
+      </p:ext>
+    </p:extLst>
+  </p:cSld>
+  <p:clrMapOvr>
+    <a:masterClrMapping/>
+  </p:clrMapOvr>
+</p:sld>
+</file>
+
 <file path=ppt/slides/slide2.xml><?xml version="1.0" encoding="utf-8"?>
 <p:sld xmlns:a="http://schemas.openxmlformats.org/drawingml/2006/main" xmlns:r="http://schemas.openxmlformats.org/officeDocument/2006/relationships" xmlns:p="http://schemas.openxmlformats.org/presentationml/2006/main">
   <p:cSld>
@@ -3544,48 +4695,26 @@
       </p:grpSpPr>
       <p:pic>
         <p:nvPicPr>
-          <p:cNvPr id="1026" name="Picture 2">
-            <a:extLst>
-              <a:ext uri="{FF2B5EF4-FFF2-40B4-BE49-F238E27FC236}">
-                <a16:creationId xmlns:a16="http://schemas.microsoft.com/office/drawing/2014/main" id="{34F14F22-6C22-1CED-E9C1-2328570DA8CA}"/>
-              </a:ext>
-            </a:extLst>
-          </p:cNvPr>
+          <p:cNvPr id="2" name="Picture 1" descr="paper-guest-cycle.png"/>
           <p:cNvPicPr>
-            <a:picLocks noChangeAspect="1" noChangeArrowheads="1"/>
+            <a:picLocks noChangeAspect="1"/>
           </p:cNvPicPr>
           <p:nvPr/>
         </p:nvPicPr>
         <p:blipFill>
-          <a:blip r:embed="rId2">
-            <a:extLst>
-              <a:ext uri="{28A0092B-C50C-407E-A947-70E740481C1C}">
-                <a14:useLocalDpi xmlns:a14="http://schemas.microsoft.com/office/drawing/2010/main" val="0"/>
-              </a:ext>
-            </a:extLst>
-          </a:blip>
+          <a:blip r:embed="rId3"/>
           <a:stretch>
             <a:fillRect/>
           </a:stretch>
         </p:blipFill>
-        <p:spPr bwMode="auto">
+        <p:spPr>
           <a:xfrm>
-            <a:off x="643467" y="1247986"/>
-            <a:ext cx="10905066" cy="4362026"/>
+            <a:off x="518160" y="1347716"/>
+            <a:ext cx="11155680" cy="4162567"/>
           </a:xfrm>
           <a:prstGeom prst="rect">
             <a:avLst/>
           </a:prstGeom>
-          <a:noFill/>
-          <a:extLst>
-            <a:ext uri="{909E8E84-426E-40DD-AFC4-6F175D3DCCD1}">
-              <a14:hiddenFill xmlns:a14="http://schemas.microsoft.com/office/drawing/2010/main">
-                <a:solidFill>
-                  <a:srgbClr val="FFFFFF"/>
-                </a:solidFill>
-              </a14:hiddenFill>
-            </a:ext>
-          </a:extLst>
         </p:spPr>
       </p:pic>
     </p:spTree>
@@ -3602,6 +4731,48 @@
 </file>
 
 <file path=ppt/slides/slide4.xml><?xml version="1.0" encoding="utf-8"?>
+<p:sld xmlns:a="http://schemas.openxmlformats.org/drawingml/2006/main" xmlns:p="http://schemas.openxmlformats.org/presentationml/2006/main" xmlns:r="http://schemas.openxmlformats.org/officeDocument/2006/relationships">
+  <p:cSld>
+    <p:spTree>
+      <p:nvGrpSpPr>
+        <p:cNvPr id="1" name=""/>
+        <p:cNvGrpSpPr/>
+        <p:nvPr/>
+      </p:nvGrpSpPr>
+      <p:grpSpPr/>
+      <p:pic>
+        <p:nvPicPr>
+          <p:cNvPr id="2" name="Picture 1" descr="paper-notation-key.png"/>
+          <p:cNvPicPr>
+            <a:picLocks noChangeAspect="1"/>
+          </p:cNvPicPr>
+          <p:nvPr/>
+        </p:nvPicPr>
+        <p:blipFill>
+          <a:blip r:embed="rId2"/>
+          <a:stretch>
+            <a:fillRect/>
+          </a:stretch>
+        </p:blipFill>
+        <p:spPr>
+          <a:xfrm>
+            <a:off x="1016000" y="685800"/>
+            <a:ext cx="10160000" cy="5486400"/>
+          </a:xfrm>
+          <a:prstGeom prst="rect">
+            <a:avLst/>
+          </a:prstGeom>
+        </p:spPr>
+      </p:pic>
+    </p:spTree>
+  </p:cSld>
+  <p:clrMapOvr>
+    <a:masterClrMapping/>
+  </p:clrMapOvr>
+</p:sld>
+</file>
+
+<file path=ppt/slides/slide5.xml><?xml version="1.0" encoding="utf-8"?>
 <p:sld xmlns:a="http://schemas.openxmlformats.org/drawingml/2006/main" xmlns:r="http://schemas.openxmlformats.org/officeDocument/2006/relationships" xmlns:p="http://schemas.openxmlformats.org/presentationml/2006/main">
   <p:cSld>
     <p:spTree>
@@ -3777,7 +4948,67 @@
 </p:sld>
 </file>
 
-<file path=ppt/slides/slide5.xml><?xml version="1.0" encoding="utf-8"?>
+<file path=ppt/slides/slide6.xml><?xml version="1.0" encoding="utf-8"?>
+<p:sld xmlns:a="http://schemas.openxmlformats.org/drawingml/2006/main" xmlns:p="http://schemas.openxmlformats.org/presentationml/2006/main" xmlns:r="http://schemas.openxmlformats.org/officeDocument/2006/relationships">
+  <p:cSld>
+    <p:spTree>
+      <p:nvGrpSpPr>
+        <p:cNvPr id="1" name=""/>
+        <p:cNvGrpSpPr/>
+        <p:nvPr/>
+      </p:nvGrpSpPr>
+      <p:grpSpPr/>
+      <p:sp>
+        <p:nvSpPr>
+          <p:cNvPr id="2" name="Title 1"/>
+          <p:cNvSpPr>
+            <a:spLocks noGrp="1"/>
+          </p:cNvSpPr>
+          <p:nvPr>
+            <p:ph type="title"/>
+          </p:nvPr>
+        </p:nvSpPr>
+        <p:spPr/>
+        <p:txBody>
+          <a:bodyPr/>
+          <a:lstStyle/>
+          <a:p>
+            <a:r>
+              <a:t>Debrief — the Worked Flows</a:t>
+            </a:r>
+          </a:p>
+        </p:txBody>
+      </p:sp>
+      <p:sp>
+        <p:nvSpPr>
+          <p:cNvPr id="3" name="Text Placeholder 2"/>
+          <p:cNvSpPr>
+            <a:spLocks noGrp="1"/>
+          </p:cNvSpPr>
+          <p:nvPr>
+            <p:ph type="body" idx="1"/>
+          </p:nvPr>
+        </p:nvSpPr>
+        <p:spPr/>
+        <p:txBody>
+          <a:bodyPr/>
+          <a:lstStyle/>
+          <a:p>
+            <a:r>
+              <a:t>Do not show these until the tables have drawn their own.</a:t>
+            </a:r>
+          </a:p>
+        </p:txBody>
+      </p:sp>
+    </p:spTree>
+  </p:cSld>
+  <p:clrMapOvr>
+    <a:masterClrMapping/>
+  </p:clrMapOvr>
+</p:sld>
+</file>
+
+<file path=ppt/slides/slide7.xml><?xml version="1.0" encoding="utf-8"?>
 <p:sld xmlns:a="http://schemas.openxmlformats.org/drawingml/2006/main" xmlns:r="http://schemas.openxmlformats.org/officeDocument/2006/relationships" xmlns:p="http://schemas.openxmlformats.org/presentationml/2006/main">
   <p:cSld>
     <p:spTree>
@@ -3837,7 +5068,7 @@
 </p:sld>
 </file>
 
-<file path=ppt/slides/slide6.xml><?xml version="1.0" encoding="utf-8"?>
+<file path=ppt/slides/slide8.xml><?xml version="1.0" encoding="utf-8"?>
 <p:sld xmlns:a="http://schemas.openxmlformats.org/drawingml/2006/main" xmlns:r="http://schemas.openxmlformats.org/officeDocument/2006/relationships" xmlns:p="http://schemas.openxmlformats.org/presentationml/2006/main">
   <p:cSld>
     <p:bg>
@@ -3905,7 +5136,7 @@
 </p:sld>
 </file>
 
-<file path=ppt/slides/slide7.xml><?xml version="1.0" encoding="utf-8"?>
+<file path=ppt/slides/slide9.xml><?xml version="1.0" encoding="utf-8"?>
 <p:sld xmlns:a="http://schemas.openxmlformats.org/drawingml/2006/main" xmlns:r="http://schemas.openxmlformats.org/officeDocument/2006/relationships" xmlns:p="http://schemas.openxmlformats.org/presentationml/2006/main">
   <p:cSld>
     <p:bg>
@@ -3964,202 +5195,6 @@
     <p:extLst>
       <p:ext uri="{BB962C8B-B14F-4D97-AF65-F5344CB8AC3E}">
         <p14:creationId xmlns:p14="http://schemas.microsoft.com/office/powerpoint/2010/main" val="1793994499"/>
-      </p:ext>
-    </p:extLst>
-  </p:cSld>
-  <p:clrMapOvr>
-    <a:masterClrMapping/>
-  </p:clrMapOvr>
-</p:sld>
-</file>
-
-<file path=ppt/slides/slide8.xml><?xml version="1.0" encoding="utf-8"?>
-<p:sld xmlns:a="http://schemas.openxmlformats.org/drawingml/2006/main" xmlns:r="http://schemas.openxmlformats.org/officeDocument/2006/relationships" xmlns:p="http://schemas.openxmlformats.org/presentationml/2006/main">
-  <p:cSld>
-    <p:spTree>
-      <p:nvGrpSpPr>
-        <p:cNvPr id="1" name=""/>
-        <p:cNvGrpSpPr/>
-        <p:nvPr/>
-      </p:nvGrpSpPr>
-      <p:grpSpPr>
-        <a:xfrm>
-          <a:off x="0" y="0"/>
-          <a:ext cx="0" cy="0"/>
-          <a:chOff x="0" y="0"/>
-          <a:chExt cx="0" cy="0"/>
-        </a:xfrm>
-      </p:grpSpPr>
-      <p:pic>
-        <p:nvPicPr>
-          <p:cNvPr id="5" name="Picture 4" descr="A diagram of a service&#10;&#10;Description automatically generated">
-            <a:extLst>
-              <a:ext uri="{FF2B5EF4-FFF2-40B4-BE49-F238E27FC236}">
-                <a16:creationId xmlns:a16="http://schemas.microsoft.com/office/drawing/2014/main" id="{6A5EF504-89C5-07FD-0B0C-16BCD1A79D96}"/>
-              </a:ext>
-            </a:extLst>
-          </p:cNvPr>
-          <p:cNvPicPr>
-            <a:picLocks noChangeAspect="1"/>
-          </p:cNvPicPr>
-          <p:nvPr/>
-        </p:nvPicPr>
-        <p:blipFill>
-          <a:blip r:embed="rId2"/>
-          <a:stretch>
-            <a:fillRect/>
-          </a:stretch>
-        </p:blipFill>
-        <p:spPr>
-          <a:xfrm>
-            <a:off x="2698750" y="1035050"/>
-            <a:ext cx="6794500" cy="4787900"/>
-          </a:xfrm>
-          <a:prstGeom prst="rect">
-            <a:avLst/>
-          </a:prstGeom>
-        </p:spPr>
-      </p:pic>
-    </p:spTree>
-    <p:extLst>
-      <p:ext uri="{BB962C8B-B14F-4D97-AF65-F5344CB8AC3E}">
-        <p14:creationId xmlns:p14="http://schemas.microsoft.com/office/powerpoint/2010/main" val="2233859570"/>
-      </p:ext>
-    </p:extLst>
-  </p:cSld>
-  <p:clrMapOvr>
-    <a:masterClrMapping/>
-  </p:clrMapOvr>
-</p:sld>
-</file>
-
-<file path=ppt/slides/slide9.xml><?xml version="1.0" encoding="utf-8"?>
-<p:sld xmlns:a="http://schemas.openxmlformats.org/drawingml/2006/main" xmlns:r="http://schemas.openxmlformats.org/officeDocument/2006/relationships" xmlns:p="http://schemas.openxmlformats.org/presentationml/2006/main">
-  <p:cSld>
-    <p:spTree>
-      <p:nvGrpSpPr>
-        <p:cNvPr id="1" name=""/>
-        <p:cNvGrpSpPr/>
-        <p:nvPr/>
-      </p:nvGrpSpPr>
-      <p:grpSpPr>
-        <a:xfrm>
-          <a:off x="0" y="0"/>
-          <a:ext cx="0" cy="0"/>
-          <a:chOff x="0" y="0"/>
-          <a:chExt cx="0" cy="0"/>
-        </a:xfrm>
-      </p:grpSpPr>
-      <p:sp>
-        <p:nvSpPr>
-          <p:cNvPr id="2" name="Title 1">
-            <a:extLst>
-              <a:ext uri="{FF2B5EF4-FFF2-40B4-BE49-F238E27FC236}">
-                <a16:creationId xmlns:a16="http://schemas.microsoft.com/office/drawing/2014/main" id="{FF65E1A8-624A-201C-7B77-2ACA62051C83}"/>
-              </a:ext>
-            </a:extLst>
-          </p:cNvPr>
-          <p:cNvSpPr>
-            <a:spLocks noGrp="1"/>
-          </p:cNvSpPr>
-          <p:nvPr>
-            <p:ph type="title"/>
-          </p:nvPr>
-        </p:nvSpPr>
-        <p:spPr/>
-        <p:txBody>
-          <a:bodyPr/>
-          <a:lstStyle/>
-          <a:p>
-            <a:r>
-              <a:rPr lang="en-GB" dirty="0"/>
-              <a:t>What Would This Look Like?</a:t>
-            </a:r>
-          </a:p>
-        </p:txBody>
-      </p:sp>
-      <p:sp>
-        <p:nvSpPr>
-          <p:cNvPr id="3" name="Content Placeholder 2">
-            <a:extLst>
-              <a:ext uri="{FF2B5EF4-FFF2-40B4-BE49-F238E27FC236}">
-                <a16:creationId xmlns:a16="http://schemas.microsoft.com/office/drawing/2014/main" id="{E7652786-E9AE-56EB-AE90-95A87636056F}"/>
-              </a:ext>
-            </a:extLst>
-          </p:cNvPr>
-          <p:cNvSpPr>
-            <a:spLocks noGrp="1"/>
-          </p:cNvSpPr>
-          <p:nvPr>
-            <p:ph idx="1"/>
-          </p:nvPr>
-        </p:nvSpPr>
-        <p:spPr/>
-        <p:txBody>
-          <a:bodyPr>
-            <a:normAutofit/>
-          </a:bodyPr>
-          <a:lstStyle/>
-          <a:p>
-            <a:r>
-              <a:rPr lang="en-GB"/>
-              <a:t>Take any </a:t>
-            </a:r>
-            <a:r>
-              <a:rPr lang="en-GB" dirty="0"/>
-              <a:t>Step from the Paper Model and think of it in FBP</a:t>
-            </a:r>
-          </a:p>
-          <a:p>
-            <a:pPr lvl="1"/>
-            <a:r>
-              <a:rPr lang="en-GB" dirty="0"/>
-              <a:t>What are the Information Packets, Nodes and Ports</a:t>
-            </a:r>
-          </a:p>
-          <a:p>
-            <a:pPr lvl="1"/>
-            <a:r>
-              <a:rPr lang="en-GB" dirty="0"/>
-              <a:t>Where do we have lookups?</a:t>
-            </a:r>
-          </a:p>
-          <a:p>
-            <a:pPr lvl="1"/>
-            <a:r>
-              <a:rPr lang="en-GB" dirty="0"/>
-              <a:t>Where do we need to store state?</a:t>
-            </a:r>
-          </a:p>
-          <a:p>
-            <a:r>
-              <a:rPr lang="en-GB" dirty="0"/>
-              <a:t>Think about what patterns of messaging we might have?</a:t>
-            </a:r>
-          </a:p>
-          <a:p>
-            <a:pPr lvl="1"/>
-            <a:r>
-              <a:rPr lang="en-GB" dirty="0"/>
-              <a:t>In-Out?</a:t>
-            </a:r>
-          </a:p>
-          <a:p>
-            <a:pPr lvl="1"/>
-            <a:r>
-              <a:rPr lang="en-GB" dirty="0"/>
-              <a:t>Out-Only?</a:t>
-            </a:r>
-          </a:p>
-          <a:p>
-            <a:endParaRPr lang="en-GB" dirty="0"/>
-          </a:p>
-        </p:txBody>
-      </p:sp>
-    </p:spTree>
-    <p:extLst>
-      <p:ext uri="{BB962C8B-B14F-4D97-AF65-F5344CB8AC3E}">
-        <p14:creationId xmlns:p14="http://schemas.microsoft.com/office/powerpoint/2010/main" val="39058674"/>
       </p:ext>
     </p:extLst>
   </p:cSld>
@@ -4482,4 +5517,324 @@
     </a:ext>
   </a:extLst>
 </a:theme>
+</file>
+
+<file path=ppt/theme/theme2.xml><?xml version="1.0" encoding="utf-8"?>
+<a:theme xmlns:a="http://schemas.openxmlformats.org/drawingml/2006/main" name="Office Theme">
+  <a:themeElements>
+    <a:clrScheme name="Office">
+      <a:dk1>
+        <a:sysClr val="windowText" lastClr="000000"/>
+      </a:dk1>
+      <a:lt1>
+        <a:sysClr val="window" lastClr="FFFFFF"/>
+      </a:lt1>
+      <a:dk2>
+        <a:srgbClr val="1F497D"/>
+      </a:dk2>
+      <a:lt2>
+        <a:srgbClr val="EEECE1"/>
+      </a:lt2>
+      <a:accent1>
+        <a:srgbClr val="4F81BD"/>
+      </a:accent1>
+      <a:accent2>
+        <a:srgbClr val="C0504D"/>
+      </a:accent2>
+      <a:accent3>
+        <a:srgbClr val="9BBB59"/>
+      </a:accent3>
+      <a:accent4>
+        <a:srgbClr val="8064A2"/>
+      </a:accent4>
+      <a:accent5>
+        <a:srgbClr val="4BACC6"/>
+      </a:accent5>
+      <a:accent6>
+        <a:srgbClr val="F79646"/>
+      </a:accent6>
+      <a:hlink>
+        <a:srgbClr val="0000FF"/>
+      </a:hlink>
+      <a:folHlink>
+        <a:srgbClr val="800080"/>
+      </a:folHlink>
+    </a:clrScheme>
+    <a:fontScheme name="Office">
+      <a:majorFont>
+        <a:latin typeface="Calibri"/>
+        <a:ea typeface=""/>
+        <a:cs typeface=""/>
+        <a:font script="Jpan" typeface="ＭＳ Ｐゴシック"/>
+        <a:font script="Hang" typeface="맑은 고딕"/>
+        <a:font script="Hans" typeface="宋体"/>
+        <a:font script="Hant" typeface="新細明體"/>
+        <a:font script="Arab" typeface="Times New Roman"/>
+        <a:font script="Hebr" typeface="Times New Roman"/>
+        <a:font script="Thai" typeface="Angsana New"/>
+        <a:font script="Ethi" typeface="Nyala"/>
+        <a:font script="Beng" typeface="Vrinda"/>
+        <a:font script="Gujr" typeface="Shruti"/>
+        <a:font script="Khmr" typeface="MoolBoran"/>
+        <a:font script="Knda" typeface="Tunga"/>
+        <a:font script="Guru" typeface="Raavi"/>
+        <a:font script="Cans" typeface="Euphemia"/>
+        <a:font script="Cher" typeface="Plantagenet Cherokee"/>
+        <a:font script="Yiii" typeface="Microsoft Yi Baiti"/>
+        <a:font script="Tibt" typeface="Microsoft Himalaya"/>
+        <a:font script="Thaa" typeface="MV Boli"/>
+        <a:font script="Deva" typeface="Mangal"/>
+        <a:font script="Telu" typeface="Gautami"/>
+        <a:font script="Taml" typeface="Latha"/>
+        <a:font script="Syrc" typeface="Estrangelo Edessa"/>
+        <a:font script="Orya" typeface="Kalinga"/>
+        <a:font script="Mlym" typeface="Kartika"/>
+        <a:font script="Laoo" typeface="DokChampa"/>
+        <a:font script="Sinh" typeface="Iskoola Pota"/>
+        <a:font script="Mong" typeface="Mongolian Baiti"/>
+        <a:font script="Viet" typeface="Times New Roman"/>
+        <a:font script="Uigh" typeface="Microsoft Uighur"/>
+        <a:font script="Geor" typeface="Sylfaen"/>
+      </a:majorFont>
+      <a:minorFont>
+        <a:latin typeface="Calibri"/>
+        <a:ea typeface=""/>
+        <a:cs typeface=""/>
+        <a:font script="Jpan" typeface="ＭＳ Ｐゴシック"/>
+        <a:font script="Hang" typeface="맑은 고딕"/>
+        <a:font script="Hans" typeface="宋体"/>
+        <a:font script="Hant" typeface="新細明體"/>
+        <a:font script="Arab" typeface="Arial"/>
+        <a:font script="Hebr" typeface="Arial"/>
+        <a:font script="Thai" typeface="Cordia New"/>
+        <a:font script="Ethi" typeface="Nyala"/>
+        <a:font script="Beng" typeface="Vrinda"/>
+        <a:font script="Gujr" typeface="Shruti"/>
+        <a:font script="Khmr" typeface="DaunPenh"/>
+        <a:font script="Knda" typeface="Tunga"/>
+        <a:font script="Guru" typeface="Raavi"/>
+        <a:font script="Cans" typeface="Euphemia"/>
+        <a:font script="Cher" typeface="Plantagenet Cherokee"/>
+        <a:font script="Yiii" typeface="Microsoft Yi Baiti"/>
+        <a:font script="Tibt" typeface="Microsoft Himalaya"/>
+        <a:font script="Thaa" typeface="MV Boli"/>
+        <a:font script="Deva" typeface="Mangal"/>
+        <a:font script="Telu" typeface="Gautami"/>
+        <a:font script="Taml" typeface="Latha"/>
+        <a:font script="Syrc" typeface="Estrangelo Edessa"/>
+        <a:font script="Orya" typeface="Kalinga"/>
+        <a:font script="Mlym" typeface="Kartika"/>
+        <a:font script="Laoo" typeface="DokChampa"/>
+        <a:font script="Sinh" typeface="Iskoola Pota"/>
+        <a:font script="Mong" typeface="Mongolian Baiti"/>
+        <a:font script="Viet" typeface="Arial"/>
+        <a:font script="Uigh" typeface="Microsoft Uighur"/>
+        <a:font script="Geor" typeface="Sylfaen"/>
+      </a:minorFont>
+    </a:fontScheme>
+    <a:fmtScheme name="Office">
+      <a:fillStyleLst>
+        <a:solidFill>
+          <a:schemeClr val="phClr"/>
+        </a:solidFill>
+        <a:gradFill rotWithShape="1">
+          <a:gsLst>
+            <a:gs pos="0">
+              <a:schemeClr val="phClr">
+                <a:tint val="50000"/>
+                <a:satMod val="300000"/>
+              </a:schemeClr>
+            </a:gs>
+            <a:gs pos="35000">
+              <a:schemeClr val="phClr">
+                <a:tint val="37000"/>
+                <a:satMod val="300000"/>
+              </a:schemeClr>
+            </a:gs>
+            <a:gs pos="100000">
+              <a:schemeClr val="phClr">
+                <a:tint val="15000"/>
+                <a:satMod val="350000"/>
+              </a:schemeClr>
+            </a:gs>
+          </a:gsLst>
+          <a:lin ang="16200000" scaled="1"/>
+        </a:gradFill>
+        <a:gradFill rotWithShape="1">
+          <a:gsLst>
+            <a:gs pos="0">
+              <a:schemeClr val="phClr">
+                <a:tint val="100000"/>
+                <a:shade val="100000"/>
+                <a:satMod val="130000"/>
+              </a:schemeClr>
+            </a:gs>
+            <a:gs pos="100000">
+              <a:schemeClr val="phClr">
+                <a:tint val="50000"/>
+                <a:shade val="100000"/>
+                <a:satMod val="350000"/>
+              </a:schemeClr>
+            </a:gs>
+          </a:gsLst>
+          <a:lin ang="16200000" scaled="0"/>
+        </a:gradFill>
+      </a:fillStyleLst>
+      <a:lnStyleLst>
+        <a:ln w="9525" cap="flat" cmpd="sng" algn="ctr">
+          <a:solidFill>
+            <a:schemeClr val="phClr">
+              <a:shade val="95000"/>
+              <a:satMod val="105000"/>
+            </a:schemeClr>
+          </a:solidFill>
+          <a:prstDash val="solid"/>
+        </a:ln>
+        <a:ln w="25400" cap="flat" cmpd="sng" algn="ctr">
+          <a:solidFill>
+            <a:schemeClr val="phClr"/>
+          </a:solidFill>
+          <a:prstDash val="solid"/>
+        </a:ln>
+        <a:ln w="38100" cap="flat" cmpd="sng" algn="ctr">
+          <a:solidFill>
+            <a:schemeClr val="phClr"/>
+          </a:solidFill>
+          <a:prstDash val="solid"/>
+        </a:ln>
+      </a:lnStyleLst>
+      <a:effectStyleLst>
+        <a:effectStyle>
+          <a:effectLst>
+            <a:outerShdw blurRad="40000" dist="20000" dir="5400000" rotWithShape="0">
+              <a:srgbClr val="000000">
+                <a:alpha val="38000"/>
+              </a:srgbClr>
+            </a:outerShdw>
+          </a:effectLst>
+        </a:effectStyle>
+        <a:effectStyle>
+          <a:effectLst>
+            <a:outerShdw blurRad="40000" dist="23000" dir="5400000" rotWithShape="0">
+              <a:srgbClr val="000000">
+                <a:alpha val="35000"/>
+              </a:srgbClr>
+            </a:outerShdw>
+          </a:effectLst>
+        </a:effectStyle>
+        <a:effectStyle>
+          <a:effectLst>
+            <a:outerShdw blurRad="40000" dist="23000" dir="5400000" rotWithShape="0">
+              <a:srgbClr val="000000">
+                <a:alpha val="35000"/>
+              </a:srgbClr>
+            </a:outerShdw>
+          </a:effectLst>
+          <a:scene3d>
+            <a:camera prst="orthographicFront">
+              <a:rot lat="0" lon="0" rev="0"/>
+            </a:camera>
+            <a:lightRig rig="threePt" dir="t">
+              <a:rot lat="0" lon="0" rev="1200000"/>
+            </a:lightRig>
+          </a:scene3d>
+          <a:sp3d>
+            <a:bevelT w="63500" h="25400"/>
+          </a:sp3d>
+        </a:effectStyle>
+      </a:effectStyleLst>
+      <a:bgFillStyleLst>
+        <a:solidFill>
+          <a:schemeClr val="phClr"/>
+        </a:solidFill>
+        <a:gradFill rotWithShape="1">
+          <a:gsLst>
+            <a:gs pos="0">
+              <a:schemeClr val="phClr">
+                <a:tint val="40000"/>
+                <a:satMod val="350000"/>
+              </a:schemeClr>
+            </a:gs>
+            <a:gs pos="40000">
+              <a:schemeClr val="phClr">
+                <a:tint val="45000"/>
+                <a:shade val="99000"/>
+                <a:satMod val="350000"/>
+              </a:schemeClr>
+            </a:gs>
+            <a:gs pos="100000">
+              <a:schemeClr val="phClr">
+                <a:shade val="20000"/>
+                <a:satMod val="255000"/>
+              </a:schemeClr>
+            </a:gs>
+          </a:gsLst>
+          <a:path path="circle">
+            <a:fillToRect l="50000" t="-80000" r="50000" b="180000"/>
+          </a:path>
+        </a:gradFill>
+        <a:gradFill rotWithShape="1">
+          <a:gsLst>
+            <a:gs pos="0">
+              <a:schemeClr val="phClr">
+                <a:tint val="80000"/>
+                <a:satMod val="300000"/>
+              </a:schemeClr>
+            </a:gs>
+            <a:gs pos="100000">
+              <a:schemeClr val="phClr">
+                <a:shade val="30000"/>
+                <a:satMod val="200000"/>
+              </a:schemeClr>
+            </a:gs>
+          </a:gsLst>
+          <a:path path="circle">
+            <a:fillToRect l="50000" t="50000" r="50000" b="50000"/>
+          </a:path>
+        </a:gradFill>
+      </a:bgFillStyleLst>
+    </a:fmtScheme>
+  </a:themeElements>
+  <a:objectDefaults>
+    <a:spDef>
+      <a:spPr/>
+      <a:bodyPr/>
+      <a:lstStyle/>
+      <a:style>
+        <a:lnRef idx="1">
+          <a:schemeClr val="accent1"/>
+        </a:lnRef>
+        <a:fillRef idx="3">
+          <a:schemeClr val="accent1"/>
+        </a:fillRef>
+        <a:effectRef idx="2">
+          <a:schemeClr val="accent1"/>
+        </a:effectRef>
+        <a:fontRef idx="minor">
+          <a:schemeClr val="lt1"/>
+        </a:fontRef>
+      </a:style>
+    </a:spDef>
+    <a:lnDef>
+      <a:spPr/>
+      <a:bodyPr/>
+      <a:lstStyle/>
+      <a:style>
+        <a:lnRef idx="2">
+          <a:schemeClr val="accent1"/>
+        </a:lnRef>
+        <a:fillRef idx="0">
+          <a:schemeClr val="accent1"/>
+        </a:fillRef>
+        <a:effectRef idx="1">
+          <a:schemeClr val="accent1"/>
+        </a:effectRef>
+        <a:fontRef idx="minor">
+          <a:schemeClr val="tx1"/>
+        </a:fontRef>
+      </a:style>
+    </a:lnDef>
+  </a:objectDefaults>
+  <a:extraClrSchemeLst/>
+</a:theme>
 </file>